--- a/exports/pptx/lessons/middle-module-10-herbs-aushadhi/day-10-showcase-summative.pptx
+++ b/exports/pptx/lessons/middle-module-10-herbs-aushadhi/day-10-showcase-summative.pptx
@@ -16,9 +16,10 @@
     <p:sldId id="264" r:id="rId10"/>
     <p:sldId id="265" r:id="rId11"/>
     <p:sldId id="266" r:id="rId12"/>
+    <p:sldId id="267" r:id="rId13"/>
   </p:sldIdLst>
   <p:notesMasterIdLst>
-    <p:notesMasterId r:id="rId13"/>
+    <p:notesMasterId r:id="rId14"/>
   </p:notesMasterIdLst>
   <p:sldSz cx="9144000" cy="5143500"/>
   <p:notesSz cx="5143500" cy="9144000"/>
@@ -712,6 +713,94 @@
             <a:fld id="{F7021451-1387-4CA6-816F-3879F97B5CBC}" type="slidenum">
               <a:rPr lang="en-US"/>
               <a:t>11</a:t>
+            </a:fld>
+            <a:endParaRPr lang="en-US"/>
+          </a:p>
+        </p:txBody>
+      </p:sp>
+    </p:spTree>
+    <p:extLst>
+      <p:ext uri="{BB962C8B-B14F-4D97-AF65-F5344CB8AC3E}">
+        <p14:creationId xmlns:p14="http://schemas.microsoft.com/office/powerpoint/2010/main" val="1024086991"/>
+      </p:ext>
+    </p:extLst>
+  </p:cSld>
+  <p:clrMapOvr>
+    <a:masterClrMapping/>
+  </p:clrMapOvr>
+</p:notes>
+</file>
+
+<file path=ppt/notesSlides/notesSlide12.xml><?xml version="1.0" encoding="utf-8"?>
+<p:notes xmlns:a="http://schemas.openxmlformats.org/drawingml/2006/main" xmlns:r="http://schemas.openxmlformats.org/officeDocument/2006/relationships" xmlns:p="http://schemas.openxmlformats.org/presentationml/2006/main">
+  <p:cSld>
+    <p:spTree>
+      <p:nvGrpSpPr>
+        <p:cNvPr id="1" name=""/>
+        <p:cNvGrpSpPr/>
+        <p:nvPr/>
+      </p:nvGrpSpPr>
+      <p:grpSpPr>
+        <a:xfrm>
+          <a:off x="0" y="0"/>
+          <a:ext cx="0" cy="0"/>
+          <a:chOff x="0" y="0"/>
+          <a:chExt cx="0" cy="0"/>
+        </a:xfrm>
+      </p:grpSpPr>
+      <p:sp>
+        <p:nvSpPr>
+          <p:cNvPr id="2" name="Slide Image Placeholder 1"/>
+          <p:cNvSpPr>
+            <a:spLocks noGrp="1" noRot="1" noChangeAspect="1"/>
+          </p:cNvSpPr>
+          <p:nvPr>
+            <p:ph type="sldImg"/>
+          </p:nvPr>
+        </p:nvSpPr>
+        <p:spPr/>
+      </p:sp>
+      <p:sp>
+        <p:nvSpPr>
+          <p:cNvPr id="3" name="Notes Placeholder 2"/>
+          <p:cNvSpPr>
+            <a:spLocks noGrp="1"/>
+          </p:cNvSpPr>
+          <p:nvPr>
+            <p:ph type="body" idx="1"/>
+          </p:nvPr>
+        </p:nvSpPr>
+        <p:spPr/>
+        <p:txBody>
+          <a:bodyPr/>
+          <a:lstStyle/>
+          <a:p>
+            <a:r>
+              <a:rPr lang="en-US" dirty="0"/>
+              <a:t/>
+            </a:r>
+            <a:endParaRPr lang="en-US" dirty="0"/>
+          </a:p>
+        </p:txBody>
+      </p:sp>
+      <p:sp>
+        <p:nvSpPr>
+          <p:cNvPr id="4" name="Slide Number Placeholder 3"/>
+          <p:cNvSpPr>
+            <a:spLocks noGrp="1"/>
+          </p:cNvSpPr>
+          <p:nvPr>
+            <p:ph type="sldNum" sz="quarter" idx="10"/>
+          </p:nvPr>
+        </p:nvSpPr>
+        <p:spPr/>
+        <p:txBody>
+          <a:bodyPr/>
+          <a:lstStyle/>
+          <a:p>
+            <a:fld id="{F7021451-1387-4CA6-816F-3879F97B5CBC}" type="slidenum">
+              <a:rPr lang="en-US"/>
+              <a:t>12</a:t>
             </a:fld>
             <a:endParaRPr lang="en-US"/>
           </a:p>
@@ -2011,102 +2100,6 @@
         </p:nvSpPr>
         <p:spPr>
           <a:xfrm>
-            <a:off x="406301" y="1223963"/>
-            <a:ext cx="8498026" cy="274290"/>
-          </a:xfrm>
-          <a:prstGeom prst="rect">
-            <a:avLst/>
-          </a:prstGeom>
-          <a:noFill/>
-          <a:ln/>
-        </p:spPr>
-        <p:txBody>
-          <a:bodyPr wrap="square" lIns="0" tIns="0" rIns="0" bIns="0" rtlCol="0" anchor="t"/>
-          <a:lstStyle/>
-          <a:p>
-            <a:pPr algn="l" indent="0" marL="0">
-              <a:lnSpc>
-                <a:spcPts val="2160"/>
-              </a:lnSpc>
-              <a:spcBef>
-                <a:spcPts val="600"/>
-              </a:spcBef>
-              <a:spcAft>
-                <a:spcPts val="800"/>
-              </a:spcAft>
-              <a:buNone/>
-            </a:pPr>
-            <a:r>
-              <a:rPr lang="en-US" sz="1800" b="1" dirty="0">
-                <a:solidFill>
-                  <a:srgbClr val="FE4447"/>
-                </a:solidFill>
-                <a:latin typeface="Georgia" pitchFamily="34" charset="0"/>
-                <a:ea typeface="Georgia" pitchFamily="34" charset="-122"/>
-                <a:cs typeface="Georgia" pitchFamily="34" charset="-120"/>
-              </a:rPr>
-              <a:t>Learning objective</a:t>
-            </a:r>
-            <a:endParaRPr lang="en-US" sz="1800" dirty="0"/>
-          </a:p>
-        </p:txBody>
-      </p:sp>
-      <p:sp>
-        <p:nvSpPr>
-          <p:cNvPr id="6" name="Text 4"/>
-          <p:cNvSpPr/>
-          <p:nvPr/>
-        </p:nvSpPr>
-        <p:spPr>
-          <a:xfrm>
-            <a:off x="406301" y="1637854"/>
-            <a:ext cx="8498026" cy="426541"/>
-          </a:xfrm>
-          <a:prstGeom prst="rect">
-            <a:avLst/>
-          </a:prstGeom>
-          <a:noFill/>
-          <a:ln/>
-        </p:spPr>
-        <p:txBody>
-          <a:bodyPr wrap="square" lIns="0" tIns="0" rIns="0" bIns="0" rtlCol="0" anchor="t"/>
-          <a:lstStyle/>
-          <a:p>
-            <a:pPr algn="l" indent="0" marL="0">
-              <a:lnSpc>
-                <a:spcPts val="1680"/>
-              </a:lnSpc>
-              <a:spcBef>
-                <a:spcPts val="300"/>
-              </a:spcBef>
-              <a:spcAft>
-                <a:spcPts val="300"/>
-              </a:spcAft>
-              <a:buNone/>
-            </a:pPr>
-            <a:r>
-              <a:rPr lang="en-US" sz="1200" dirty="0">
-                <a:solidFill>
-                  <a:srgbClr val="1C2833"/>
-                </a:solidFill>
-                <a:latin typeface="Arial" pitchFamily="34" charset="0"/>
-                <a:ea typeface="Arial" pitchFamily="34" charset="-122"/>
-                <a:cs typeface="Arial" pitchFamily="34" charset="-120"/>
-              </a:rPr>
-              <a:t>Students present their herb deck to the class (2 minutes per pair), complete the summative quiz (20 min, 25 marks), and consolidate the module's safety message and tradition-meets-science framing.</a:t>
-            </a:r>
-            <a:endParaRPr lang="en-US" sz="1200" dirty="0"/>
-          </a:p>
-        </p:txBody>
-      </p:sp>
-      <p:sp>
-        <p:nvSpPr>
-          <p:cNvPr id="7" name="Text 5"/>
-          <p:cNvSpPr/>
-          <p:nvPr/>
-        </p:nvSpPr>
-        <p:spPr>
-          <a:xfrm>
             <a:off x="406301" y="4434929"/>
             <a:ext cx="8498026" cy="213271"/>
           </a:xfrm>
@@ -2251,7 +2244,7 @@
                 <a:ea typeface="Georgia" pitchFamily="34" charset="-122"/>
                 <a:cs typeface="Georgia" pitchFamily="34" charset="-120"/>
               </a:rPr>
-              <a:t>Teacher notes</a:t>
+              <a:t>Differentiation</a:t>
             </a:r>
             <a:endParaRPr lang="en-US" sz="1800" dirty="0"/>
           </a:p>
@@ -2265,8 +2258,8 @@
         </p:nvSpPr>
         <p:spPr>
           <a:xfrm>
-            <a:off x="406301" y="870942"/>
-            <a:ext cx="8498026" cy="639812"/>
+            <a:off x="634901" y="883593"/>
+            <a:ext cx="8102798" cy="937022"/>
           </a:xfrm>
           <a:prstGeom prst="rect">
             <a:avLst/>
@@ -2278,13 +2271,31 @@
           <a:bodyPr wrap="square" lIns="0" tIns="0" rIns="0" bIns="0" rtlCol="0" anchor="t"/>
           <a:lstStyle/>
           <a:p>
+            <a:pPr algn="l" marL="342900" indent="-342900">
+              <a:lnSpc>
+                <a:spcPts val="1620"/>
+              </a:lnSpc>
+              <a:spcAft>
+                <a:spcPts val="300"/>
+              </a:spcAft>
+              <a:buSzPct val="100000"/>
+              <a:buChar char="•"/>
+            </a:pPr>
+            <a:r>
+              <a:rPr lang="en-US" sz="1200" b="1" dirty="0">
+                <a:solidFill>
+                  <a:srgbClr val="1C2833"/>
+                </a:solidFill>
+                <a:latin typeface="Arial" pitchFamily="34" charset="0"/>
+                <a:ea typeface="Arial" pitchFamily="34" charset="-122"/>
+                <a:cs typeface="Arial" pitchFamily="34" charset="-120"/>
+              </a:rPr>
+              <a:t>Tier up:</a:t>
+            </a:r>
             <a:pPr algn="l" indent="0" marL="0">
               <a:lnSpc>
-                <a:spcPts val="1680"/>
-              </a:lnSpc>
-              <a:spcBef>
-                <a:spcPts val="300"/>
-              </a:spcBef>
+                <a:spcPts val="1620"/>
+              </a:lnSpc>
               <a:spcAft>
                 <a:spcPts val="300"/>
               </a:spcAft>
@@ -2299,15 +2310,12 @@
                 <a:ea typeface="Arial" pitchFamily="34" charset="-122"/>
                 <a:cs typeface="Arial" pitchFamily="34" charset="-120"/>
               </a:rPr>
-              <a:t>– The mark on the rubric </a:t>
+              <a:t> Volunteers can present </a:t>
             </a:r>
             <a:pPr algn="l" indent="0" marL="0">
               <a:lnSpc>
-                <a:spcPts val="1680"/>
-              </a:lnSpc>
-              <a:spcBef>
-                <a:spcPts val="300"/>
-              </a:spcBef>
+                <a:spcPts val="1620"/>
+              </a:lnSpc>
               <a:spcAft>
                 <a:spcPts val="300"/>
               </a:spcAft>
@@ -2322,15 +2330,12 @@
                 <a:ea typeface="Arial" pitchFamily="34" charset="-122"/>
                 <a:cs typeface="Arial" pitchFamily="34" charset="-120"/>
               </a:rPr>
-              <a:t>as the pair presents</a:t>
+              <a:t>for</a:t>
             </a:r>
             <a:pPr algn="l" indent="0" marL="0">
               <a:lnSpc>
-                <a:spcPts val="1680"/>
-              </a:lnSpc>
-              <a:spcBef>
-                <a:spcPts val="300"/>
-              </a:spcBef>
+                <a:spcPts val="1620"/>
+              </a:lnSpc>
               <a:spcAft>
                 <a:spcPts val="300"/>
               </a:spcAft>
@@ -2345,7 +2350,51 @@
                 <a:ea typeface="Arial" pitchFamily="34" charset="-122"/>
                 <a:cs typeface="Arial" pitchFamily="34" charset="-120"/>
               </a:rPr>
-              <a:t> — not after. Trust your first read. – If the quiz takes longer than 20 minutes for the slowest students, extend by 5 max. Don't let it eat into presentations. – Reflection question at the end ("what stays with you?") is the most honest indicator of what landed. Note it down if you can — useful for adjusting Year 2.</a:t>
+              <a:t> 3 minutes by request, presenting two cards — one of the six standard and one bonus card they made.</a:t>
+            </a:r>
+            <a:endParaRPr lang="en-US" sz="1200" dirty="0"/>
+          </a:p>
+          <a:p>
+            <a:pPr algn="l" marL="342900" indent="-342900">
+              <a:lnSpc>
+                <a:spcPts val="1620"/>
+              </a:lnSpc>
+              <a:spcAft>
+                <a:spcPts val="300"/>
+              </a:spcAft>
+              <a:buSzPct val="100000"/>
+              <a:buChar char="•"/>
+            </a:pPr>
+            <a:r>
+              <a:rPr lang="en-US" sz="1200" b="1" dirty="0">
+                <a:solidFill>
+                  <a:srgbClr val="1C2833"/>
+                </a:solidFill>
+                <a:latin typeface="Arial" pitchFamily="34" charset="0"/>
+                <a:ea typeface="Arial" pitchFamily="34" charset="-122"/>
+                <a:cs typeface="Arial" pitchFamily="34" charset="-120"/>
+              </a:rPr>
+              <a:t>Tier down:</a:t>
+            </a:r>
+            <a:pPr algn="l" indent="0" marL="0">
+              <a:lnSpc>
+                <a:spcPts val="1620"/>
+              </a:lnSpc>
+              <a:spcAft>
+                <a:spcPts val="300"/>
+              </a:spcAft>
+              <a:buNone/>
+            </a:pPr>
+            <a:r>
+              <a:rPr lang="en-US" sz="1200" dirty="0">
+                <a:solidFill>
+                  <a:srgbClr val="1C2833"/>
+                </a:solidFill>
+                <a:latin typeface="Arial" pitchFamily="34" charset="0"/>
+                <a:ea typeface="Arial" pitchFamily="34" charset="-122"/>
+                <a:cs typeface="Arial" pitchFamily="34" charset="-120"/>
+              </a:rPr>
+              <a:t> A student who freezes can have their pair-partner present while they hold up the card. Don't make this a failure mode.</a:t>
             </a:r>
             <a:endParaRPr lang="en-US" sz="1200" dirty="0"/>
           </a:p>
@@ -2503,7 +2552,7 @@
                 <a:ea typeface="Georgia" pitchFamily="34" charset="-122"/>
                 <a:cs typeface="Georgia" pitchFamily="34" charset="-120"/>
               </a:rPr>
-              <a:t>Citation(s) used in this lesson</a:t>
+              <a:t>Teacher notes</a:t>
             </a:r>
             <a:endParaRPr lang="en-US" sz="1800" dirty="0"/>
           </a:p>
@@ -2517,8 +2566,8 @@
         </p:nvSpPr>
         <p:spPr>
           <a:xfrm>
-            <a:off x="406301" y="870942"/>
-            <a:ext cx="8498026" cy="445591"/>
+            <a:off x="634901" y="883593"/>
+            <a:ext cx="8102798" cy="975122"/>
           </a:xfrm>
           <a:prstGeom prst="rect">
             <a:avLst/>
@@ -2530,8 +2579,142 @@
           <a:bodyPr wrap="square" lIns="0" tIns="0" rIns="0" bIns="0" rtlCol="0" anchor="t"/>
           <a:lstStyle/>
           <a:p>
+            <a:pPr algn="l" marL="342900" indent="-342900">
+              <a:lnSpc>
+                <a:spcPts val="1620"/>
+              </a:lnSpc>
+              <a:spcAft>
+                <a:spcPts val="300"/>
+              </a:spcAft>
+              <a:buSzPct val="100000"/>
+              <a:buChar char="•"/>
+            </a:pPr>
+            <a:r>
+              <a:rPr lang="en-US" sz="1200" dirty="0">
+                <a:solidFill>
+                  <a:srgbClr val="1C2833"/>
+                </a:solidFill>
+                <a:latin typeface="Arial" pitchFamily="34" charset="0"/>
+                <a:ea typeface="Arial" pitchFamily="34" charset="-122"/>
+                <a:cs typeface="Arial" pitchFamily="34" charset="-120"/>
+              </a:rPr>
+              <a:t>The mark on the rubric </a:t>
+            </a:r>
             <a:pPr algn="l" indent="0" marL="0">
               <a:lnSpc>
+                <a:spcPts val="1620"/>
+              </a:lnSpc>
+              <a:spcAft>
+                <a:spcPts val="300"/>
+              </a:spcAft>
+              <a:buNone/>
+            </a:pPr>
+            <a:r>
+              <a:rPr lang="en-US" sz="1200" b="1" dirty="0">
+                <a:solidFill>
+                  <a:srgbClr val="1C2833"/>
+                </a:solidFill>
+                <a:latin typeface="Arial" pitchFamily="34" charset="0"/>
+                <a:ea typeface="Arial" pitchFamily="34" charset="-122"/>
+                <a:cs typeface="Arial" pitchFamily="34" charset="-120"/>
+              </a:rPr>
+              <a:t>as the pair presents</a:t>
+            </a:r>
+            <a:pPr algn="l" indent="0" marL="0">
+              <a:lnSpc>
+                <a:spcPts val="1620"/>
+              </a:lnSpc>
+              <a:spcAft>
+                <a:spcPts val="300"/>
+              </a:spcAft>
+              <a:buNone/>
+            </a:pPr>
+            <a:r>
+              <a:rPr lang="en-US" sz="1200" dirty="0">
+                <a:solidFill>
+                  <a:srgbClr val="1C2833"/>
+                </a:solidFill>
+                <a:latin typeface="Arial" pitchFamily="34" charset="0"/>
+                <a:ea typeface="Arial" pitchFamily="34" charset="-122"/>
+                <a:cs typeface="Arial" pitchFamily="34" charset="-120"/>
+              </a:rPr>
+              <a:t> — not after. Trust your first read.</a:t>
+            </a:r>
+            <a:endParaRPr lang="en-US" sz="1200" dirty="0"/>
+          </a:p>
+          <a:p>
+            <a:pPr algn="l" marL="342900" indent="-342900">
+              <a:lnSpc>
+                <a:spcPts val="1620"/>
+              </a:lnSpc>
+              <a:spcAft>
+                <a:spcPts val="300"/>
+              </a:spcAft>
+              <a:buSzPct val="100000"/>
+              <a:buChar char="•"/>
+            </a:pPr>
+            <a:r>
+              <a:rPr lang="en-US" sz="1200" dirty="0">
+                <a:solidFill>
+                  <a:srgbClr val="1C2833"/>
+                </a:solidFill>
+                <a:latin typeface="Arial" pitchFamily="34" charset="0"/>
+                <a:ea typeface="Arial" pitchFamily="34" charset="-122"/>
+                <a:cs typeface="Arial" pitchFamily="34" charset="-120"/>
+              </a:rPr>
+              <a:t>If the quiz takes longer than 20 minutes for the slowest students, extend by 5 max. Don't let it eat into presentations.</a:t>
+            </a:r>
+            <a:endParaRPr lang="en-US" sz="1200" dirty="0"/>
+          </a:p>
+          <a:p>
+            <a:pPr algn="l" marL="342900" indent="-342900">
+              <a:lnSpc>
+                <a:spcPts val="1620"/>
+              </a:lnSpc>
+              <a:spcAft>
+                <a:spcPts val="300"/>
+              </a:spcAft>
+              <a:buSzPct val="100000"/>
+              <a:buChar char="•"/>
+            </a:pPr>
+            <a:r>
+              <a:rPr lang="en-US" sz="1200" dirty="0">
+                <a:solidFill>
+                  <a:srgbClr val="1C2833"/>
+                </a:solidFill>
+                <a:latin typeface="Arial" pitchFamily="34" charset="0"/>
+                <a:ea typeface="Arial" pitchFamily="34" charset="-122"/>
+                <a:cs typeface="Arial" pitchFamily="34" charset="-120"/>
+              </a:rPr>
+              <a:t>Reflection question at the end ("what stays with you?") is the most honest indicator of what landed. Note it down if you can — useful for adjusting Year 2.</a:t>
+            </a:r>
+            <a:endParaRPr lang="en-US" sz="1200" dirty="0"/>
+          </a:p>
+        </p:txBody>
+      </p:sp>
+      <p:sp>
+        <p:nvSpPr>
+          <p:cNvPr id="5" name="Text 3"/>
+          <p:cNvSpPr/>
+          <p:nvPr/>
+        </p:nvSpPr>
+        <p:spPr>
+          <a:xfrm>
+            <a:off x="406301" y="4434929"/>
+            <a:ext cx="8498026" cy="213271"/>
+          </a:xfrm>
+          <a:prstGeom prst="rect">
+            <a:avLst/>
+          </a:prstGeom>
+          <a:noFill/>
+          <a:ln/>
+        </p:spPr>
+        <p:txBody>
+          <a:bodyPr wrap="square" lIns="0" tIns="0" rIns="0" bIns="0" rtlCol="0" anchor="t"/>
+          <a:lstStyle/>
+          <a:p>
+            <a:pPr algn="l" indent="0" marL="0">
+              <a:lnSpc>
                 <a:spcPts val="1680"/>
               </a:lnSpc>
               <a:spcBef>
@@ -2551,19 +2734,152 @@
                 <a:ea typeface="Arial" pitchFamily="34" charset="-122"/>
                 <a:cs typeface="Arial" pitchFamily="34" charset="-120"/>
               </a:rPr>
-              <a:t>– Quiz: </a:t>
-            </a:r>
+              <a:t>Middle ·  · IKS Curriculum</a:t>
+            </a:r>
+            <a:endParaRPr lang="en-US" sz="1200" dirty="0"/>
+          </a:p>
+        </p:txBody>
+      </p:sp>
+    </p:spTree>
+  </p:cSld>
+  <p:clrMapOvr>
+    <a:masterClrMapping/>
+  </p:clrMapOvr>
+</p:sld>
+</file>
+
+<file path=ppt/slides/slide12.xml><?xml version="1.0" encoding="utf-8"?>
+<p:sld xmlns:a="http://schemas.openxmlformats.org/drawingml/2006/main" xmlns:r="http://schemas.openxmlformats.org/officeDocument/2006/relationships" xmlns:p="http://schemas.openxmlformats.org/presentationml/2006/main">
+  <p:cSld name="Slide 12">
+    <p:bg>
+      <p:bgPr>
+        <a:solidFill>
+          <a:srgbClr val="FFFFFF"/>
+        </a:solidFill>
+      </p:bgPr>
+    </p:bg>
+    <p:spTree>
+      <p:nvGrpSpPr>
+        <p:cNvPr id="1" name=""/>
+        <p:cNvGrpSpPr/>
+        <p:nvPr/>
+      </p:nvGrpSpPr>
+      <p:grpSpPr>
+        <a:xfrm>
+          <a:off x="0" y="0"/>
+          <a:ext cx="0" cy="0"/>
+          <a:chOff x="0" y="0"/>
+          <a:chExt cx="0" cy="0"/>
+        </a:xfrm>
+      </p:grpSpPr>
+      <p:sp>
+        <p:nvSpPr>
+          <p:cNvPr id="2" name="Text 0"/>
+          <p:cNvSpPr/>
+          <p:nvPr/>
+        </p:nvSpPr>
+        <p:spPr>
+          <a:xfrm>
+            <a:off x="0" y="0"/>
+            <a:ext cx="9144000" cy="101501"/>
+          </a:xfrm>
+          <a:prstGeom prst="rect">
+            <a:avLst/>
+          </a:prstGeom>
+          <a:solidFill>
+            <a:srgbClr val="277884"/>
+          </a:solidFill>
+          <a:ln/>
+        </p:spPr>
+        <p:txBody>
+          <a:bodyPr wrap="square" rtlCol="0" anchor="ctr"/>
+          <a:lstStyle/>
+          <a:p>
+            <a:pPr indent="0" marL="0">
+              <a:buNone/>
+            </a:pPr>
+            <a:endParaRPr lang="en-US" dirty="0"/>
+          </a:p>
+        </p:txBody>
+      </p:sp>
+      <p:sp>
+        <p:nvSpPr>
+          <p:cNvPr id="3" name="Text 1"/>
+          <p:cNvSpPr/>
+          <p:nvPr/>
+        </p:nvSpPr>
+        <p:spPr>
+          <a:xfrm>
+            <a:off x="406301" y="457051"/>
+            <a:ext cx="8498026" cy="274290"/>
+          </a:xfrm>
+          <a:prstGeom prst="rect">
+            <a:avLst/>
+          </a:prstGeom>
+          <a:noFill/>
+          <a:ln/>
+        </p:spPr>
+        <p:txBody>
+          <a:bodyPr wrap="square" lIns="0" tIns="0" rIns="0" bIns="0" rtlCol="0" anchor="t"/>
+          <a:lstStyle/>
+          <a:p>
             <a:pPr algn="l" indent="0" marL="0">
               <a:lnSpc>
-                <a:spcPts val="1680"/>
+                <a:spcPts val="2160"/>
               </a:lnSpc>
               <a:spcBef>
-                <a:spcPts val="300"/>
+                <a:spcPts val="600"/>
               </a:spcBef>
               <a:spcAft>
-                <a:spcPts val="300"/>
-              </a:spcAft>
-              <a:buNone/>
+                <a:spcPts val="800"/>
+              </a:spcAft>
+              <a:buNone/>
+            </a:pPr>
+            <a:r>
+              <a:rPr lang="en-US" sz="1800" b="1" dirty="0">
+                <a:solidFill>
+                  <a:srgbClr val="FE4447"/>
+                </a:solidFill>
+                <a:latin typeface="Georgia" pitchFamily="34" charset="0"/>
+                <a:ea typeface="Georgia" pitchFamily="34" charset="-122"/>
+                <a:cs typeface="Georgia" pitchFamily="34" charset="-120"/>
+              </a:rPr>
+              <a:t>Citation(s) used in this lesson</a:t>
+            </a:r>
+            <a:endParaRPr lang="en-US" sz="1800" dirty="0"/>
+          </a:p>
+        </p:txBody>
+      </p:sp>
+      <p:sp>
+        <p:nvSpPr>
+          <p:cNvPr id="4" name="Text 2"/>
+          <p:cNvSpPr/>
+          <p:nvPr/>
+        </p:nvSpPr>
+        <p:spPr>
+          <a:xfrm>
+            <a:off x="634901" y="883593"/>
+            <a:ext cx="8102798" cy="826591"/>
+          </a:xfrm>
+          <a:prstGeom prst="rect">
+            <a:avLst/>
+          </a:prstGeom>
+          <a:noFill/>
+          <a:ln/>
+        </p:spPr>
+        <p:txBody>
+          <a:bodyPr wrap="square" lIns="0" tIns="0" rIns="0" bIns="0" rtlCol="0" anchor="t"/>
+          <a:lstStyle/>
+          <a:p>
+            <a:pPr algn="l" marL="342900" indent="-342900">
+              <a:lnSpc>
+                <a:spcPts val="1620"/>
+              </a:lnSpc>
+              <a:spcAft>
+                <a:spcPts val="300"/>
+              </a:spcAft>
+              <a:buSzPct val="100000"/>
+              <a:buChar char="•"/>
             </a:pPr>
             <a:r>
               <a:rPr lang="en-US" sz="1200" dirty="0">
@@ -2574,15 +2890,56 @@
                 <a:ea typeface="Arial" pitchFamily="34" charset="-122"/>
                 <a:cs typeface="Arial" pitchFamily="34" charset="-120"/>
               </a:rPr>
+              <a:t>Quiz: </a:t>
+            </a:r>
+            <a:pPr algn="l" indent="0" marL="0">
+              <a:lnSpc>
+                <a:spcPts val="1620"/>
+              </a:lnSpc>
+              <a:spcAft>
+                <a:spcPts val="300"/>
+              </a:spcAft>
+              <a:buNone/>
+            </a:pPr>
+            <a:r>
+              <a:rPr lang="en-US" sz="1200" dirty="0">
+                <a:solidFill>
+                  <a:srgbClr val="1C2833"/>
+                </a:solidFill>
+                <a:latin typeface="Arial" pitchFamily="34" charset="0"/>
+                <a:ea typeface="Arial" pitchFamily="34" charset="-122"/>
+                <a:cs typeface="Arial" pitchFamily="34" charset="-120"/>
+              </a:rPr>
               <a:t>quizzes/summative.md</a:t>
             </a:r>
+            <a:endParaRPr lang="en-US" sz="1200" dirty="0"/>
+          </a:p>
+          <a:p>
+            <a:pPr algn="l" marL="342900" indent="-342900">
+              <a:lnSpc>
+                <a:spcPts val="1620"/>
+              </a:lnSpc>
+              <a:spcAft>
+                <a:spcPts val="300"/>
+              </a:spcAft>
+              <a:buSzPct val="100000"/>
+              <a:buChar char="•"/>
+            </a:pPr>
+            <a:r>
+              <a:rPr lang="en-US" sz="1200" dirty="0">
+                <a:solidFill>
+                  <a:srgbClr val="1C2833"/>
+                </a:solidFill>
+                <a:latin typeface="Arial" pitchFamily="34" charset="0"/>
+                <a:ea typeface="Arial" pitchFamily="34" charset="-122"/>
+                <a:cs typeface="Arial" pitchFamily="34" charset="-120"/>
+              </a:rPr>
+              <a:t>Rubric: </a:t>
+            </a:r>
             <a:pPr algn="l" indent="0" marL="0">
               <a:lnSpc>
-                <a:spcPts val="1680"/>
-              </a:lnSpc>
-              <a:spcBef>
-                <a:spcPts val="300"/>
-              </a:spcBef>
+                <a:spcPts val="1620"/>
+              </a:lnSpc>
               <a:spcAft>
                 <a:spcPts val="300"/>
               </a:spcAft>
@@ -2597,61 +2954,36 @@
                 <a:ea typeface="Arial" pitchFamily="34" charset="-122"/>
                 <a:cs typeface="Arial" pitchFamily="34" charset="-120"/>
               </a:rPr>
-              <a:t> – Rubric: </a:t>
+              <a:t>assessments/rubric.md</a:t>
+            </a:r>
+            <a:endParaRPr lang="en-US" sz="1200" dirty="0"/>
+          </a:p>
+          <a:p>
+            <a:pPr algn="l" marL="342900" indent="-342900">
+              <a:lnSpc>
+                <a:spcPts val="1620"/>
+              </a:lnSpc>
+              <a:spcAft>
+                <a:spcPts val="300"/>
+              </a:spcAft>
+              <a:buSzPct val="100000"/>
+              <a:buChar char="•"/>
+            </a:pPr>
+            <a:r>
+              <a:rPr lang="en-US" sz="1200" dirty="0">
+                <a:solidFill>
+                  <a:srgbClr val="1C2833"/>
+                </a:solidFill>
+                <a:latin typeface="Arial" pitchFamily="34" charset="0"/>
+                <a:ea typeface="Arial" pitchFamily="34" charset="-122"/>
+                <a:cs typeface="Arial" pitchFamily="34" charset="-120"/>
+              </a:rPr>
+              <a:t>Project brief: </a:t>
             </a:r>
             <a:pPr algn="l" indent="0" marL="0">
               <a:lnSpc>
-                <a:spcPts val="1680"/>
-              </a:lnSpc>
-              <a:spcBef>
-                <a:spcPts val="300"/>
-              </a:spcBef>
-              <a:spcAft>
-                <a:spcPts val="300"/>
-              </a:spcAft>
-              <a:buNone/>
-            </a:pPr>
-            <a:r>
-              <a:rPr lang="en-US" sz="1200" dirty="0">
-                <a:solidFill>
-                  <a:srgbClr val="1C2833"/>
-                </a:solidFill>
-                <a:latin typeface="Arial" pitchFamily="34" charset="0"/>
-                <a:ea typeface="Arial" pitchFamily="34" charset="-122"/>
-                <a:cs typeface="Arial" pitchFamily="34" charset="-120"/>
-              </a:rPr>
-              <a:t>assessments/rubric.md</a:t>
-            </a:r>
-            <a:pPr algn="l" indent="0" marL="0">
-              <a:lnSpc>
-                <a:spcPts val="1680"/>
-              </a:lnSpc>
-              <a:spcBef>
-                <a:spcPts val="300"/>
-              </a:spcBef>
-              <a:spcAft>
-                <a:spcPts val="300"/>
-              </a:spcAft>
-              <a:buNone/>
-            </a:pPr>
-            <a:r>
-              <a:rPr lang="en-US" sz="1200" dirty="0">
-                <a:solidFill>
-                  <a:srgbClr val="1C2833"/>
-                </a:solidFill>
-                <a:latin typeface="Arial" pitchFamily="34" charset="0"/>
-                <a:ea typeface="Arial" pitchFamily="34" charset="-122"/>
-                <a:cs typeface="Arial" pitchFamily="34" charset="-120"/>
-              </a:rPr>
-              <a:t> – Project brief: </a:t>
-            </a:r>
-            <a:pPr algn="l" indent="0" marL="0">
-              <a:lnSpc>
-                <a:spcPts val="1680"/>
-              </a:lnSpc>
-              <a:spcBef>
-                <a:spcPts val="300"/>
-              </a:spcBef>
+                <a:spcPts val="1620"/>
+              </a:lnSpc>
               <a:spcAft>
                 <a:spcPts val="300"/>
               </a:spcAft>
@@ -2824,7 +3156,7 @@
                 <a:ea typeface="Georgia" pitchFamily="34" charset="-122"/>
                 <a:cs typeface="Georgia" pitchFamily="34" charset="-120"/>
               </a:rPr>
-              <a:t>Materials</a:t>
+              <a:t>Learning objective</a:t>
             </a:r>
             <a:endParaRPr lang="en-US" sz="1800" dirty="0"/>
           </a:p>
@@ -2839,7 +3171,7 @@
         <p:spPr>
           <a:xfrm>
             <a:off x="406301" y="870942"/>
-            <a:ext cx="8498026" cy="445591"/>
+            <a:ext cx="8498026" cy="426541"/>
           </a:xfrm>
           <a:prstGeom prst="rect">
             <a:avLst/>
@@ -2872,99 +3204,7 @@
                 <a:ea typeface="Arial" pitchFamily="34" charset="-122"/>
                 <a:cs typeface="Arial" pitchFamily="34" charset="-120"/>
               </a:rPr>
-              <a:t>– All pairs' completed decks – Printed copies of </a:t>
-            </a:r>
-            <a:pPr algn="l" indent="0" marL="0">
-              <a:lnSpc>
-                <a:spcPts val="1680"/>
-              </a:lnSpc>
-              <a:spcBef>
-                <a:spcPts val="300"/>
-              </a:spcBef>
-              <a:spcAft>
-                <a:spcPts val="300"/>
-              </a:spcAft>
-              <a:buNone/>
-            </a:pPr>
-            <a:r>
-              <a:rPr lang="en-US" sz="1200" dirty="0">
-                <a:solidFill>
-                  <a:srgbClr val="1C2833"/>
-                </a:solidFill>
-                <a:latin typeface="Arial" pitchFamily="34" charset="0"/>
-                <a:ea typeface="Arial" pitchFamily="34" charset="-122"/>
-                <a:cs typeface="Arial" pitchFamily="34" charset="-120"/>
-              </a:rPr>
-              <a:t>quizzes/summative.md</a:t>
-            </a:r>
-            <a:pPr algn="l" indent="0" marL="0">
-              <a:lnSpc>
-                <a:spcPts val="1680"/>
-              </a:lnSpc>
-              <a:spcBef>
-                <a:spcPts val="300"/>
-              </a:spcBef>
-              <a:spcAft>
-                <a:spcPts val="300"/>
-              </a:spcAft>
-              <a:buNone/>
-            </a:pPr>
-            <a:r>
-              <a:rPr lang="en-US" sz="1200" dirty="0">
-                <a:solidFill>
-                  <a:srgbClr val="1C2833"/>
-                </a:solidFill>
-                <a:latin typeface="Arial" pitchFamily="34" charset="0"/>
-                <a:ea typeface="Arial" pitchFamily="34" charset="-122"/>
-                <a:cs typeface="Arial" pitchFamily="34" charset="-120"/>
-              </a:rPr>
-              <a:t> — one per student – Rubric (</a:t>
-            </a:r>
-            <a:pPr algn="l" indent="0" marL="0">
-              <a:lnSpc>
-                <a:spcPts val="1680"/>
-              </a:lnSpc>
-              <a:spcBef>
-                <a:spcPts val="300"/>
-              </a:spcBef>
-              <a:spcAft>
-                <a:spcPts val="300"/>
-              </a:spcAft>
-              <a:buNone/>
-            </a:pPr>
-            <a:r>
-              <a:rPr lang="en-US" sz="1200" dirty="0">
-                <a:solidFill>
-                  <a:srgbClr val="1C2833"/>
-                </a:solidFill>
-                <a:latin typeface="Arial" pitchFamily="34" charset="0"/>
-                <a:ea typeface="Arial" pitchFamily="34" charset="-122"/>
-                <a:cs typeface="Arial" pitchFamily="34" charset="-120"/>
-              </a:rPr>
-              <a:t>assessments/rubric.md</a:t>
-            </a:r>
-            <a:pPr algn="l" indent="0" marL="0">
-              <a:lnSpc>
-                <a:spcPts val="1680"/>
-              </a:lnSpc>
-              <a:spcBef>
-                <a:spcPts val="300"/>
-              </a:spcBef>
-              <a:spcAft>
-                <a:spcPts val="300"/>
-              </a:spcAft>
-              <a:buNone/>
-            </a:pPr>
-            <a:r>
-              <a:rPr lang="en-US" sz="1200" dirty="0">
-                <a:solidFill>
-                  <a:srgbClr val="1C2833"/>
-                </a:solidFill>
-                <a:latin typeface="Arial" pitchFamily="34" charset="0"/>
-                <a:ea typeface="Arial" pitchFamily="34" charset="-122"/>
-                <a:cs typeface="Arial" pitchFamily="34" charset="-120"/>
-              </a:rPr>
-              <a:t>) for in-the-moment marking – Timer – Whiteboard</a:t>
+              <a:t>Students present their herb deck to the class (2 minutes per pair), complete the summative quiz (20 min, 25 marks), and consolidate the module's safety message and tradition-meets-science framing.</a:t>
             </a:r>
             <a:endParaRPr lang="en-US" sz="1200" dirty="0"/>
           </a:p>
@@ -3122,7 +3362,7 @@
                 <a:ea typeface="Georgia" pitchFamily="34" charset="-122"/>
                 <a:cs typeface="Georgia" pitchFamily="34" charset="-120"/>
               </a:rPr>
-              <a:t>Lesson flow</a:t>
+              <a:t>Materials</a:t>
             </a:r>
             <a:endParaRPr lang="en-US" sz="1800" dirty="0"/>
           </a:p>
@@ -3131,6 +3371,228 @@
       <p:sp>
         <p:nvSpPr>
           <p:cNvPr id="4" name="Text 2"/>
+          <p:cNvSpPr/>
+          <p:nvPr/>
+        </p:nvSpPr>
+        <p:spPr>
+          <a:xfrm>
+            <a:off x="634901" y="883593"/>
+            <a:ext cx="8102798" cy="1295102"/>
+          </a:xfrm>
+          <a:prstGeom prst="rect">
+            <a:avLst/>
+          </a:prstGeom>
+          <a:noFill/>
+          <a:ln/>
+        </p:spPr>
+        <p:txBody>
+          <a:bodyPr wrap="square" lIns="0" tIns="0" rIns="0" bIns="0" rtlCol="0" anchor="t"/>
+          <a:lstStyle/>
+          <a:p>
+            <a:pPr algn="l" marL="342900" indent="-342900">
+              <a:lnSpc>
+                <a:spcPts val="1620"/>
+              </a:lnSpc>
+              <a:spcAft>
+                <a:spcPts val="300"/>
+              </a:spcAft>
+              <a:buSzPct val="100000"/>
+              <a:buChar char="•"/>
+            </a:pPr>
+            <a:r>
+              <a:rPr lang="en-US" sz="1200" dirty="0">
+                <a:solidFill>
+                  <a:srgbClr val="1C2833"/>
+                </a:solidFill>
+                <a:latin typeface="Arial" pitchFamily="34" charset="0"/>
+                <a:ea typeface="Arial" pitchFamily="34" charset="-122"/>
+                <a:cs typeface="Arial" pitchFamily="34" charset="-120"/>
+              </a:rPr>
+              <a:t>All pairs' completed decks</a:t>
+            </a:r>
+            <a:endParaRPr lang="en-US" sz="1200" dirty="0"/>
+          </a:p>
+          <a:p>
+            <a:pPr algn="l" marL="342900" indent="-342900">
+              <a:lnSpc>
+                <a:spcPts val="1620"/>
+              </a:lnSpc>
+              <a:spcAft>
+                <a:spcPts val="300"/>
+              </a:spcAft>
+              <a:buSzPct val="100000"/>
+              <a:buChar char="•"/>
+            </a:pPr>
+            <a:r>
+              <a:rPr lang="en-US" sz="1200" dirty="0">
+                <a:solidFill>
+                  <a:srgbClr val="1C2833"/>
+                </a:solidFill>
+                <a:latin typeface="Arial" pitchFamily="34" charset="0"/>
+                <a:ea typeface="Arial" pitchFamily="34" charset="-122"/>
+                <a:cs typeface="Arial" pitchFamily="34" charset="-120"/>
+              </a:rPr>
+              <a:t>Printed copies of </a:t>
+            </a:r>
+            <a:pPr algn="l" indent="0" marL="0">
+              <a:lnSpc>
+                <a:spcPts val="1620"/>
+              </a:lnSpc>
+              <a:spcAft>
+                <a:spcPts val="300"/>
+              </a:spcAft>
+              <a:buNone/>
+            </a:pPr>
+            <a:r>
+              <a:rPr lang="en-US" sz="1200" dirty="0">
+                <a:solidFill>
+                  <a:srgbClr val="1C2833"/>
+                </a:solidFill>
+                <a:latin typeface="Arial" pitchFamily="34" charset="0"/>
+                <a:ea typeface="Arial" pitchFamily="34" charset="-122"/>
+                <a:cs typeface="Arial" pitchFamily="34" charset="-120"/>
+              </a:rPr>
+              <a:t>quizzes/summative.md</a:t>
+            </a:r>
+            <a:pPr algn="l" indent="0" marL="0">
+              <a:lnSpc>
+                <a:spcPts val="1620"/>
+              </a:lnSpc>
+              <a:spcAft>
+                <a:spcPts val="300"/>
+              </a:spcAft>
+              <a:buNone/>
+            </a:pPr>
+            <a:r>
+              <a:rPr lang="en-US" sz="1200" dirty="0">
+                <a:solidFill>
+                  <a:srgbClr val="1C2833"/>
+                </a:solidFill>
+                <a:latin typeface="Arial" pitchFamily="34" charset="0"/>
+                <a:ea typeface="Arial" pitchFamily="34" charset="-122"/>
+                <a:cs typeface="Arial" pitchFamily="34" charset="-120"/>
+              </a:rPr>
+              <a:t> — one per student</a:t>
+            </a:r>
+            <a:endParaRPr lang="en-US" sz="1200" dirty="0"/>
+          </a:p>
+          <a:p>
+            <a:pPr algn="l" marL="342900" indent="-342900">
+              <a:lnSpc>
+                <a:spcPts val="1620"/>
+              </a:lnSpc>
+              <a:spcAft>
+                <a:spcPts val="300"/>
+              </a:spcAft>
+              <a:buSzPct val="100000"/>
+              <a:buChar char="•"/>
+            </a:pPr>
+            <a:r>
+              <a:rPr lang="en-US" sz="1200" dirty="0">
+                <a:solidFill>
+                  <a:srgbClr val="1C2833"/>
+                </a:solidFill>
+                <a:latin typeface="Arial" pitchFamily="34" charset="0"/>
+                <a:ea typeface="Arial" pitchFamily="34" charset="-122"/>
+                <a:cs typeface="Arial" pitchFamily="34" charset="-120"/>
+              </a:rPr>
+              <a:t>Rubric (</a:t>
+            </a:r>
+            <a:pPr algn="l" indent="0" marL="0">
+              <a:lnSpc>
+                <a:spcPts val="1620"/>
+              </a:lnSpc>
+              <a:spcAft>
+                <a:spcPts val="300"/>
+              </a:spcAft>
+              <a:buNone/>
+            </a:pPr>
+            <a:r>
+              <a:rPr lang="en-US" sz="1200" dirty="0">
+                <a:solidFill>
+                  <a:srgbClr val="1C2833"/>
+                </a:solidFill>
+                <a:latin typeface="Arial" pitchFamily="34" charset="0"/>
+                <a:ea typeface="Arial" pitchFamily="34" charset="-122"/>
+                <a:cs typeface="Arial" pitchFamily="34" charset="-120"/>
+              </a:rPr>
+              <a:t>assessments/rubric.md</a:t>
+            </a:r>
+            <a:pPr algn="l" indent="0" marL="0">
+              <a:lnSpc>
+                <a:spcPts val="1620"/>
+              </a:lnSpc>
+              <a:spcAft>
+                <a:spcPts val="300"/>
+              </a:spcAft>
+              <a:buNone/>
+            </a:pPr>
+            <a:r>
+              <a:rPr lang="en-US" sz="1200" dirty="0">
+                <a:solidFill>
+                  <a:srgbClr val="1C2833"/>
+                </a:solidFill>
+                <a:latin typeface="Arial" pitchFamily="34" charset="0"/>
+                <a:ea typeface="Arial" pitchFamily="34" charset="-122"/>
+                <a:cs typeface="Arial" pitchFamily="34" charset="-120"/>
+              </a:rPr>
+              <a:t>) for in-the-moment marking</a:t>
+            </a:r>
+            <a:endParaRPr lang="en-US" sz="1200" dirty="0"/>
+          </a:p>
+          <a:p>
+            <a:pPr algn="l" marL="342900" indent="-342900">
+              <a:lnSpc>
+                <a:spcPts val="1620"/>
+              </a:lnSpc>
+              <a:spcAft>
+                <a:spcPts val="300"/>
+              </a:spcAft>
+              <a:buSzPct val="100000"/>
+              <a:buChar char="•"/>
+            </a:pPr>
+            <a:r>
+              <a:rPr lang="en-US" sz="1200" dirty="0">
+                <a:solidFill>
+                  <a:srgbClr val="1C2833"/>
+                </a:solidFill>
+                <a:latin typeface="Arial" pitchFamily="34" charset="0"/>
+                <a:ea typeface="Arial" pitchFamily="34" charset="-122"/>
+                <a:cs typeface="Arial" pitchFamily="34" charset="-120"/>
+              </a:rPr>
+              <a:t>Timer</a:t>
+            </a:r>
+            <a:endParaRPr lang="en-US" sz="1200" dirty="0"/>
+          </a:p>
+          <a:p>
+            <a:pPr algn="l" marL="342900" indent="-342900">
+              <a:lnSpc>
+                <a:spcPts val="1620"/>
+              </a:lnSpc>
+              <a:spcAft>
+                <a:spcPts val="300"/>
+              </a:spcAft>
+              <a:buSzPct val="100000"/>
+              <a:buChar char="•"/>
+            </a:pPr>
+            <a:r>
+              <a:rPr lang="en-US" sz="1200" dirty="0">
+                <a:solidFill>
+                  <a:srgbClr val="1C2833"/>
+                </a:solidFill>
+                <a:latin typeface="Arial" pitchFamily="34" charset="0"/>
+                <a:ea typeface="Arial" pitchFamily="34" charset="-122"/>
+                <a:cs typeface="Arial" pitchFamily="34" charset="-120"/>
+              </a:rPr>
+              <a:t>Whiteboard</a:t>
+            </a:r>
+            <a:endParaRPr lang="en-US" sz="1200" dirty="0"/>
+          </a:p>
+        </p:txBody>
+      </p:sp>
+      <p:sp>
+        <p:nvSpPr>
+          <p:cNvPr id="5" name="Text 3"/>
           <p:cNvSpPr/>
           <p:nvPr/>
         </p:nvSpPr>
@@ -3280,7 +3742,7 @@
                 <a:ea typeface="Georgia" pitchFamily="34" charset="-122"/>
                 <a:cs typeface="Georgia" pitchFamily="34" charset="-120"/>
               </a:rPr>
-              <a:t>Warm-up (3 min)</a:t>
+              <a:t>Lesson flow</a:t>
             </a:r>
             <a:endParaRPr lang="en-US" sz="1800" dirty="0"/>
           </a:p>
@@ -3289,54 +3751,6 @@
       <p:sp>
         <p:nvSpPr>
           <p:cNvPr id="4" name="Text 2"/>
-          <p:cNvSpPr/>
-          <p:nvPr/>
-        </p:nvSpPr>
-        <p:spPr>
-          <a:xfrm>
-            <a:off x="406301" y="870942"/>
-            <a:ext cx="8498026" cy="426541"/>
-          </a:xfrm>
-          <a:prstGeom prst="rect">
-            <a:avLst/>
-          </a:prstGeom>
-          <a:noFill/>
-          <a:ln/>
-        </p:spPr>
-        <p:txBody>
-          <a:bodyPr wrap="square" lIns="0" tIns="0" rIns="0" bIns="0" rtlCol="0" anchor="t"/>
-          <a:lstStyle/>
-          <a:p>
-            <a:pPr algn="l" indent="0" marL="0">
-              <a:lnSpc>
-                <a:spcPts val="1680"/>
-              </a:lnSpc>
-              <a:spcBef>
-                <a:spcPts val="300"/>
-              </a:spcBef>
-              <a:spcAft>
-                <a:spcPts val="300"/>
-              </a:spcAft>
-              <a:buNone/>
-            </a:pPr>
-            <a:r>
-              <a:rPr lang="en-US" sz="1200" dirty="0">
-                <a:solidFill>
-                  <a:srgbClr val="1C2833"/>
-                </a:solidFill>
-                <a:latin typeface="Arial" pitchFamily="34" charset="0"/>
-                <a:ea typeface="Arial" pitchFamily="34" charset="-122"/>
-                <a:cs typeface="Arial" pitchFamily="34" charset="-120"/>
-              </a:rPr>
-              <a:t>– Restate the safety rule one last time, chorally. – Quick housekeeping: pairs sit together, decks in front of them, name and roll number on a slip clipped to the deck.</a:t>
-            </a:r>
-            <a:endParaRPr lang="en-US" sz="1200" dirty="0"/>
-          </a:p>
-        </p:txBody>
-      </p:sp>
-      <p:sp>
-        <p:nvSpPr>
-          <p:cNvPr id="5" name="Text 3"/>
           <p:cNvSpPr/>
           <p:nvPr/>
         </p:nvSpPr>
@@ -3486,7 +3900,7 @@
                 <a:ea typeface="Georgia" pitchFamily="34" charset="-122"/>
                 <a:cs typeface="Georgia" pitchFamily="34" charset="-120"/>
               </a:rPr>
-              <a:t>Summative quiz (20 min)</a:t>
+              <a:t>Warm-up (3 min)</a:t>
             </a:r>
             <a:endParaRPr lang="en-US" sz="1800" dirty="0"/>
           </a:p>
@@ -3500,8 +3914,8 @@
         </p:nvSpPr>
         <p:spPr>
           <a:xfrm>
-            <a:off x="406301" y="870942"/>
-            <a:ext cx="8498026" cy="213271"/>
+            <a:off x="634901" y="883593"/>
+            <a:ext cx="8102798" cy="525661"/>
           </a:xfrm>
           <a:prstGeom prst="rect">
             <a:avLst/>
@@ -3513,17 +3927,15 @@
           <a:bodyPr wrap="square" lIns="0" tIns="0" rIns="0" bIns="0" rtlCol="0" anchor="t"/>
           <a:lstStyle/>
           <a:p>
-            <a:pPr algn="l" indent="0" marL="0">
-              <a:lnSpc>
-                <a:spcPts val="1680"/>
-              </a:lnSpc>
-              <a:spcBef>
-                <a:spcPts val="300"/>
-              </a:spcBef>
-              <a:spcAft>
-                <a:spcPts val="300"/>
-              </a:spcAft>
-              <a:buNone/>
+            <a:pPr algn="l" marL="342900" indent="-342900">
+              <a:lnSpc>
+                <a:spcPts val="1620"/>
+              </a:lnSpc>
+              <a:spcAft>
+                <a:spcPts val="300"/>
+              </a:spcAft>
+              <a:buSzPct val="100000"/>
+              <a:buChar char="•"/>
             </a:pPr>
             <a:r>
               <a:rPr lang="en-US" sz="1200" dirty="0">
@@ -3534,7 +3946,31 @@
                 <a:ea typeface="Arial" pitchFamily="34" charset="-122"/>
                 <a:cs typeface="Arial" pitchFamily="34" charset="-120"/>
               </a:rPr>
-              <a:t>– Distribute the quiz papers. Pencils only. Closed book. – Strict timing: 20 minutes. – Collect at minute 20.</a:t>
+              <a:t>Restate the safety rule one last time, chorally.</a:t>
+            </a:r>
+            <a:endParaRPr lang="en-US" sz="1200" dirty="0"/>
+          </a:p>
+          <a:p>
+            <a:pPr algn="l" marL="342900" indent="-342900">
+              <a:lnSpc>
+                <a:spcPts val="1620"/>
+              </a:lnSpc>
+              <a:spcAft>
+                <a:spcPts val="300"/>
+              </a:spcAft>
+              <a:buSzPct val="100000"/>
+              <a:buChar char="•"/>
+            </a:pPr>
+            <a:r>
+              <a:rPr lang="en-US" sz="1200" dirty="0">
+                <a:solidFill>
+                  <a:srgbClr val="1C2833"/>
+                </a:solidFill>
+                <a:latin typeface="Arial" pitchFamily="34" charset="0"/>
+                <a:ea typeface="Arial" pitchFamily="34" charset="-122"/>
+                <a:cs typeface="Arial" pitchFamily="34" charset="-120"/>
+              </a:rPr>
+              <a:t>Quick housekeeping: pairs sit together, decks in front of them, name and roll number on a slip clipped to the deck.</a:t>
             </a:r>
             <a:endParaRPr lang="en-US" sz="1200" dirty="0"/>
           </a:p>
@@ -3692,7 +4128,7 @@
                 <a:ea typeface="Georgia" pitchFamily="34" charset="-122"/>
                 <a:cs typeface="Georgia" pitchFamily="34" charset="-120"/>
               </a:rPr>
-              <a:t>Project presentations (20 min)</a:t>
+              <a:t>Summative quiz (20 min)</a:t>
             </a:r>
             <a:endParaRPr lang="en-US" sz="1800" dirty="0"/>
           </a:p>
@@ -3706,8 +4142,8 @@
         </p:nvSpPr>
         <p:spPr>
           <a:xfrm>
-            <a:off x="406301" y="870942"/>
-            <a:ext cx="8498026" cy="853083"/>
+            <a:off x="634901" y="883593"/>
+            <a:ext cx="8102798" cy="769441"/>
           </a:xfrm>
           <a:prstGeom prst="rect">
             <a:avLst/>
@@ -3719,17 +4155,15 @@
           <a:bodyPr wrap="square" lIns="0" tIns="0" rIns="0" bIns="0" rtlCol="0" anchor="t"/>
           <a:lstStyle/>
           <a:p>
-            <a:pPr algn="l" indent="0" marL="0">
-              <a:lnSpc>
-                <a:spcPts val="1680"/>
-              </a:lnSpc>
-              <a:spcBef>
-                <a:spcPts val="300"/>
-              </a:spcBef>
-              <a:spcAft>
-                <a:spcPts val="300"/>
-              </a:spcAft>
-              <a:buNone/>
+            <a:pPr algn="l" marL="342900" indent="-342900">
+              <a:lnSpc>
+                <a:spcPts val="1620"/>
+              </a:lnSpc>
+              <a:spcAft>
+                <a:spcPts val="300"/>
+              </a:spcAft>
+              <a:buSzPct val="100000"/>
+              <a:buChar char="•"/>
             </a:pPr>
             <a:r>
               <a:rPr lang="en-US" sz="1200" dirty="0">
@@ -3740,42 +4174,20 @@
                 <a:ea typeface="Arial" pitchFamily="34" charset="-122"/>
                 <a:cs typeface="Arial" pitchFamily="34" charset="-120"/>
               </a:rPr>
-              <a:t>– 2 minutes per pair (10 pairs ≈ full class; if more, adjust to 1:30 each). – Each pair picks </a:t>
-            </a:r>
-            <a:pPr algn="l" indent="0" marL="0">
-              <a:lnSpc>
-                <a:spcPts val="1680"/>
-              </a:lnSpc>
-              <a:spcBef>
-                <a:spcPts val="300"/>
-              </a:spcBef>
-              <a:spcAft>
-                <a:spcPts val="300"/>
-              </a:spcAft>
-              <a:buNone/>
-            </a:pPr>
-            <a:r>
-              <a:rPr lang="en-US" sz="1200" b="1" dirty="0">
-                <a:solidFill>
-                  <a:srgbClr val="1C2833"/>
-                </a:solidFill>
-                <a:latin typeface="Arial" pitchFamily="34" charset="0"/>
-                <a:ea typeface="Arial" pitchFamily="34" charset="-122"/>
-                <a:cs typeface="Arial" pitchFamily="34" charset="-120"/>
-              </a:rPr>
-              <a:t>one card</a:t>
-            </a:r>
-            <a:pPr algn="l" indent="0" marL="0">
-              <a:lnSpc>
-                <a:spcPts val="1680"/>
-              </a:lnSpc>
-              <a:spcBef>
-                <a:spcPts val="300"/>
-              </a:spcBef>
-              <a:spcAft>
-                <a:spcPts val="300"/>
-              </a:spcAft>
-              <a:buNone/>
+              <a:t>Distribute the quiz papers. Pencils only. Closed book.</a:t>
+            </a:r>
+            <a:endParaRPr lang="en-US" sz="1200" dirty="0"/>
+          </a:p>
+          <a:p>
+            <a:pPr algn="l" marL="342900" indent="-342900">
+              <a:lnSpc>
+                <a:spcPts val="1620"/>
+              </a:lnSpc>
+              <a:spcAft>
+                <a:spcPts val="300"/>
+              </a:spcAft>
+              <a:buSzPct val="100000"/>
+              <a:buChar char="•"/>
             </a:pPr>
             <a:r>
               <a:rPr lang="en-US" sz="1200" dirty="0">
@@ -3786,42 +4198,20 @@
                 <a:ea typeface="Arial" pitchFamily="34" charset="-122"/>
                 <a:cs typeface="Arial" pitchFamily="34" charset="-120"/>
               </a:rPr>
-              <a:t> from their deck to present in detail. The other five are passed around or laid out for inspection. – Mark rubrics in real-time. Don't try to mark after class — the energy fades. – Q&amp;A after each presentation is </a:t>
-            </a:r>
-            <a:pPr algn="l" indent="0" marL="0">
-              <a:lnSpc>
-                <a:spcPts val="1680"/>
-              </a:lnSpc>
-              <a:spcBef>
-                <a:spcPts val="300"/>
-              </a:spcBef>
-              <a:spcAft>
-                <a:spcPts val="300"/>
-              </a:spcAft>
-              <a:buNone/>
-            </a:pPr>
-            <a:r>
-              <a:rPr lang="en-US" sz="1200" b="1" dirty="0">
-                <a:solidFill>
-                  <a:srgbClr val="1C2833"/>
-                </a:solidFill>
-                <a:latin typeface="Arial" pitchFamily="34" charset="0"/>
-                <a:ea typeface="Arial" pitchFamily="34" charset="-122"/>
-                <a:cs typeface="Arial" pitchFamily="34" charset="-120"/>
-              </a:rPr>
-              <a:t>30 seconds</a:t>
-            </a:r>
-            <a:pPr algn="l" indent="0" marL="0">
-              <a:lnSpc>
-                <a:spcPts val="1680"/>
-              </a:lnSpc>
-              <a:spcBef>
-                <a:spcPts val="300"/>
-              </a:spcBef>
-              <a:spcAft>
-                <a:spcPts val="300"/>
-              </a:spcAft>
-              <a:buNone/>
+              <a:t>Strict timing: 20 minutes.</a:t>
+            </a:r>
+            <a:endParaRPr lang="en-US" sz="1200" dirty="0"/>
+          </a:p>
+          <a:p>
+            <a:pPr algn="l" marL="342900" indent="-342900">
+              <a:lnSpc>
+                <a:spcPts val="1620"/>
+              </a:lnSpc>
+              <a:spcAft>
+                <a:spcPts val="300"/>
+              </a:spcAft>
+              <a:buSzPct val="100000"/>
+              <a:buChar char="•"/>
             </a:pPr>
             <a:r>
               <a:rPr lang="en-US" sz="1200" dirty="0">
@@ -3832,7 +4222,7 @@
                 <a:ea typeface="Arial" pitchFamily="34" charset="-122"/>
                 <a:cs typeface="Arial" pitchFamily="34" charset="-120"/>
               </a:rPr>
-              <a:t>: one classmate's question, one pair's answer. Move on.</a:t>
+              <a:t>Collect at minute 20.</a:t>
             </a:r>
             <a:endParaRPr lang="en-US" sz="1200" dirty="0"/>
           </a:p>
@@ -3990,7 +4380,7 @@
                 <a:ea typeface="Georgia" pitchFamily="34" charset="-122"/>
                 <a:cs typeface="Georgia" pitchFamily="34" charset="-120"/>
               </a:rPr>
-              <a:t>Wrap-up (2 min)</a:t>
+              <a:t>Project presentations (20 min)</a:t>
             </a:r>
             <a:endParaRPr lang="en-US" sz="1800" dirty="0"/>
           </a:p>
@@ -4004,8 +4394,8 @@
         </p:nvSpPr>
         <p:spPr>
           <a:xfrm>
-            <a:off x="406301" y="870942"/>
-            <a:ext cx="8498026" cy="853083"/>
+            <a:off x="634901" y="883593"/>
+            <a:ext cx="8102798" cy="1013222"/>
           </a:xfrm>
           <a:prstGeom prst="rect">
             <a:avLst/>
@@ -4017,13 +4407,75 @@
           <a:bodyPr wrap="square" lIns="0" tIns="0" rIns="0" bIns="0" rtlCol="0" anchor="t"/>
           <a:lstStyle/>
           <a:p>
+            <a:pPr algn="l" marL="342900" indent="-342900">
+              <a:lnSpc>
+                <a:spcPts val="1620"/>
+              </a:lnSpc>
+              <a:spcAft>
+                <a:spcPts val="300"/>
+              </a:spcAft>
+              <a:buSzPct val="100000"/>
+              <a:buChar char="•"/>
+            </a:pPr>
+            <a:r>
+              <a:rPr lang="en-US" sz="1200" dirty="0">
+                <a:solidFill>
+                  <a:srgbClr val="1C2833"/>
+                </a:solidFill>
+                <a:latin typeface="Arial" pitchFamily="34" charset="0"/>
+                <a:ea typeface="Arial" pitchFamily="34" charset="-122"/>
+                <a:cs typeface="Arial" pitchFamily="34" charset="-120"/>
+              </a:rPr>
+              <a:t>2 minutes per pair (10 pairs ≈ full class; if more, adjust to 1:30 each).</a:t>
+            </a:r>
+            <a:endParaRPr lang="en-US" sz="1200" dirty="0"/>
+          </a:p>
+          <a:p>
+            <a:pPr algn="l" marL="342900" indent="-342900">
+              <a:lnSpc>
+                <a:spcPts val="1620"/>
+              </a:lnSpc>
+              <a:spcAft>
+                <a:spcPts val="300"/>
+              </a:spcAft>
+              <a:buSzPct val="100000"/>
+              <a:buChar char="•"/>
+            </a:pPr>
+            <a:r>
+              <a:rPr lang="en-US" sz="1200" dirty="0">
+                <a:solidFill>
+                  <a:srgbClr val="1C2833"/>
+                </a:solidFill>
+                <a:latin typeface="Arial" pitchFamily="34" charset="0"/>
+                <a:ea typeface="Arial" pitchFamily="34" charset="-122"/>
+                <a:cs typeface="Arial" pitchFamily="34" charset="-120"/>
+              </a:rPr>
+              <a:t>Each pair picks </a:t>
+            </a:r>
             <a:pPr algn="l" indent="0" marL="0">
               <a:lnSpc>
-                <a:spcPts val="1680"/>
-              </a:lnSpc>
-              <a:spcBef>
-                <a:spcPts val="300"/>
-              </a:spcBef>
+                <a:spcPts val="1620"/>
+              </a:lnSpc>
+              <a:spcAft>
+                <a:spcPts val="300"/>
+              </a:spcAft>
+              <a:buNone/>
+            </a:pPr>
+            <a:r>
+              <a:rPr lang="en-US" sz="1200" b="1" dirty="0">
+                <a:solidFill>
+                  <a:srgbClr val="1C2833"/>
+                </a:solidFill>
+                <a:latin typeface="Arial" pitchFamily="34" charset="0"/>
+                <a:ea typeface="Arial" pitchFamily="34" charset="-122"/>
+                <a:cs typeface="Arial" pitchFamily="34" charset="-120"/>
+              </a:rPr>
+              <a:t>one card</a:t>
+            </a:r>
+            <a:pPr algn="l" indent="0" marL="0">
+              <a:lnSpc>
+                <a:spcPts val="1620"/>
+              </a:lnSpc>
               <a:spcAft>
                 <a:spcPts val="300"/>
               </a:spcAft>
@@ -4038,38 +4490,80 @@
                 <a:ea typeface="Arial" pitchFamily="34" charset="-122"/>
                 <a:cs typeface="Arial" pitchFamily="34" charset="-120"/>
               </a:rPr>
-              <a:t>– Collect decks for archiving (or return to pairs if they want them home — they earned them). – One closing reflection — go around the room, each student in 5 words: </a:t>
+              <a:t> from their deck to present in detail. The other five are passed around or laid out for inspection.</a:t>
+            </a:r>
+            <a:endParaRPr lang="en-US" sz="1200" dirty="0"/>
+          </a:p>
+          <a:p>
+            <a:pPr algn="l" marL="342900" indent="-342900">
+              <a:lnSpc>
+                <a:spcPts val="1620"/>
+              </a:lnSpc>
+              <a:spcAft>
+                <a:spcPts val="300"/>
+              </a:spcAft>
+              <a:buSzPct val="100000"/>
+              <a:buChar char="•"/>
+            </a:pPr>
+            <a:r>
+              <a:rPr lang="en-US" sz="1200" dirty="0">
+                <a:solidFill>
+                  <a:srgbClr val="1C2833"/>
+                </a:solidFill>
+                <a:latin typeface="Arial" pitchFamily="34" charset="0"/>
+                <a:ea typeface="Arial" pitchFamily="34" charset="-122"/>
+                <a:cs typeface="Arial" pitchFamily="34" charset="-120"/>
+              </a:rPr>
+              <a:t>Mark rubrics in real-time. Don't try to mark after class — the energy fades.</a:t>
+            </a:r>
+            <a:endParaRPr lang="en-US" sz="1200" dirty="0"/>
+          </a:p>
+          <a:p>
+            <a:pPr algn="l" marL="342900" indent="-342900">
+              <a:lnSpc>
+                <a:spcPts val="1620"/>
+              </a:lnSpc>
+              <a:spcAft>
+                <a:spcPts val="300"/>
+              </a:spcAft>
+              <a:buSzPct val="100000"/>
+              <a:buChar char="•"/>
+            </a:pPr>
+            <a:r>
+              <a:rPr lang="en-US" sz="1200" dirty="0">
+                <a:solidFill>
+                  <a:srgbClr val="1C2833"/>
+                </a:solidFill>
+                <a:latin typeface="Arial" pitchFamily="34" charset="0"/>
+                <a:ea typeface="Arial" pitchFamily="34" charset="-122"/>
+                <a:cs typeface="Arial" pitchFamily="34" charset="-120"/>
+              </a:rPr>
+              <a:t>Q&amp;A after each presentation is </a:t>
             </a:r>
             <a:pPr algn="l" indent="0" marL="0">
               <a:lnSpc>
-                <a:spcPts val="1680"/>
-              </a:lnSpc>
-              <a:spcBef>
-                <a:spcPts val="300"/>
-              </a:spcBef>
-              <a:spcAft>
-                <a:spcPts val="300"/>
-              </a:spcAft>
-              <a:buNone/>
-            </a:pPr>
-            <a:r>
-              <a:rPr lang="en-US" sz="1200" i="1" dirty="0">
-                <a:solidFill>
-                  <a:srgbClr val="1C2833"/>
-                </a:solidFill>
-                <a:latin typeface="Arial" pitchFamily="34" charset="0"/>
-                <a:ea typeface="Arial" pitchFamily="34" charset="-122"/>
-                <a:cs typeface="Arial" pitchFamily="34" charset="-120"/>
-              </a:rPr>
-              <a:t>"What stays with you?"</a:t>
+                <a:spcPts val="1620"/>
+              </a:lnSpc>
+              <a:spcAft>
+                <a:spcPts val="300"/>
+              </a:spcAft>
+              <a:buNone/>
+            </a:pPr>
+            <a:r>
+              <a:rPr lang="en-US" sz="1200" b="1" dirty="0">
+                <a:solidFill>
+                  <a:srgbClr val="1C2833"/>
+                </a:solidFill>
+                <a:latin typeface="Arial" pitchFamily="34" charset="0"/>
+                <a:ea typeface="Arial" pitchFamily="34" charset="-122"/>
+                <a:cs typeface="Arial" pitchFamily="34" charset="-120"/>
+              </a:rPr>
+              <a:t>30 seconds</a:t>
             </a:r>
             <a:pPr algn="l" indent="0" marL="0">
               <a:lnSpc>
-                <a:spcPts val="1680"/>
-              </a:lnSpc>
-              <a:spcBef>
-                <a:spcPts val="300"/>
-              </a:spcBef>
+                <a:spcPts val="1620"/>
+              </a:lnSpc>
               <a:spcAft>
                 <a:spcPts val="300"/>
               </a:spcAft>
@@ -4084,30 +4578,7 @@
                 <a:ea typeface="Arial" pitchFamily="34" charset="-122"/>
                 <a:cs typeface="Arial" pitchFamily="34" charset="-120"/>
               </a:rPr>
-              <a:t> – Close: </a:t>
-            </a:r>
-            <a:pPr algn="l" indent="0" marL="0">
-              <a:lnSpc>
-                <a:spcPts val="1680"/>
-              </a:lnSpc>
-              <a:spcBef>
-                <a:spcPts val="300"/>
-              </a:spcBef>
-              <a:spcAft>
-                <a:spcPts val="300"/>
-              </a:spcAft>
-              <a:buNone/>
-            </a:pPr>
-            <a:r>
-              <a:rPr lang="en-US" sz="1200" i="1" dirty="0">
-                <a:solidFill>
-                  <a:srgbClr val="1C2833"/>
-                </a:solidFill>
-                <a:latin typeface="Arial" pitchFamily="34" charset="0"/>
-                <a:ea typeface="Arial" pitchFamily="34" charset="-122"/>
-                <a:cs typeface="Arial" pitchFamily="34" charset="-120"/>
-              </a:rPr>
-              <a:t>"Three things to remember from this module: food amounts are safe; tradition and science can describe the same biological reality; ask 'how much' before you ask anything else about an herb."</a:t>
+              <a:t>: one classmate's question, one pair's answer. Move on.</a:t>
             </a:r>
             <a:endParaRPr lang="en-US" sz="1200" dirty="0"/>
           </a:p>
@@ -4265,7 +4736,7 @@
                 <a:ea typeface="Georgia" pitchFamily="34" charset="-122"/>
                 <a:cs typeface="Georgia" pitchFamily="34" charset="-120"/>
               </a:rPr>
-              <a:t>Student-facing content</a:t>
+              <a:t>Wrap-up (2 min)</a:t>
             </a:r>
             <a:endParaRPr lang="en-US" sz="1800" dirty="0"/>
           </a:p>
@@ -4279,61 +4750,8 @@
         </p:nvSpPr>
         <p:spPr>
           <a:xfrm>
-            <a:off x="406301" y="883593"/>
-            <a:ext cx="8331398" cy="1343025"/>
-          </a:xfrm>
-          <a:prstGeom prst="rect">
-            <a:avLst/>
-          </a:prstGeom>
-          <a:solidFill>
-            <a:srgbClr val="F4F8F9"/>
-          </a:solidFill>
-          <a:ln/>
-        </p:spPr>
-        <p:txBody>
-          <a:bodyPr wrap="square" rtlCol="0" anchor="ctr"/>
-          <a:lstStyle/>
-          <a:p>
-            <a:pPr indent="0" marL="0">
-              <a:buNone/>
-            </a:pPr>
-            <a:endParaRPr lang="en-US" dirty="0"/>
-          </a:p>
-        </p:txBody>
-      </p:sp>
-      <p:sp>
-        <p:nvSpPr>
-          <p:cNvPr id="5" name="Shape 3"/>
-          <p:cNvSpPr/>
-          <p:nvPr/>
-        </p:nvSpPr>
-        <p:spPr>
-          <a:xfrm>
-            <a:off x="434876" y="883593"/>
-            <a:ext cx="0" cy="1343025"/>
-          </a:xfrm>
-          <a:prstGeom prst="line">
-            <a:avLst/>
-          </a:prstGeom>
-          <a:noFill/>
-          <a:ln w="57150">
-            <a:solidFill>
-              <a:srgbClr val="FE4447"/>
-            </a:solidFill>
-            <a:prstDash val="solid"/>
-          </a:ln>
-        </p:spPr>
-      </p:sp>
-      <p:sp>
-        <p:nvSpPr>
-          <p:cNvPr id="6" name="Text 4"/>
-          <p:cNvSpPr/>
-          <p:nvPr/>
-        </p:nvSpPr>
-        <p:spPr>
-          <a:xfrm>
-            <a:off x="692051" y="1074093"/>
-            <a:ext cx="7973389" cy="230981"/>
+            <a:off x="634901" y="883593"/>
+            <a:ext cx="8102798" cy="975122"/>
           </a:xfrm>
           <a:prstGeom prst="rect">
             <a:avLst/>
@@ -4345,84 +4763,122 @@
           <a:bodyPr wrap="square" lIns="0" tIns="0" rIns="0" bIns="0" rtlCol="0" anchor="t"/>
           <a:lstStyle/>
           <a:p>
+            <a:pPr algn="l" marL="342900" indent="-342900">
+              <a:lnSpc>
+                <a:spcPts val="1620"/>
+              </a:lnSpc>
+              <a:spcAft>
+                <a:spcPts val="300"/>
+              </a:spcAft>
+              <a:buSzPct val="100000"/>
+              <a:buChar char="•"/>
+            </a:pPr>
+            <a:r>
+              <a:rPr lang="en-US" sz="1200" dirty="0">
+                <a:solidFill>
+                  <a:srgbClr val="1C2833"/>
+                </a:solidFill>
+                <a:latin typeface="Arial" pitchFamily="34" charset="0"/>
+                <a:ea typeface="Arial" pitchFamily="34" charset="-122"/>
+                <a:cs typeface="Arial" pitchFamily="34" charset="-120"/>
+              </a:rPr>
+              <a:t>Collect decks for archiving (or return to pairs if they want them home — they earned them).</a:t>
+            </a:r>
+            <a:endParaRPr lang="en-US" sz="1200" dirty="0"/>
+          </a:p>
+          <a:p>
+            <a:pPr algn="l" marL="342900" indent="-342900">
+              <a:lnSpc>
+                <a:spcPts val="1620"/>
+              </a:lnSpc>
+              <a:spcAft>
+                <a:spcPts val="300"/>
+              </a:spcAft>
+              <a:buSzPct val="100000"/>
+              <a:buChar char="•"/>
+            </a:pPr>
+            <a:r>
+              <a:rPr lang="en-US" sz="1200" dirty="0">
+                <a:solidFill>
+                  <a:srgbClr val="1C2833"/>
+                </a:solidFill>
+                <a:latin typeface="Arial" pitchFamily="34" charset="0"/>
+                <a:ea typeface="Arial" pitchFamily="34" charset="-122"/>
+                <a:cs typeface="Arial" pitchFamily="34" charset="-120"/>
+              </a:rPr>
+              <a:t>One closing reflection — go around the room, each student in 5 words: </a:t>
+            </a:r>
             <a:pPr algn="l" indent="0" marL="0">
               <a:lnSpc>
-                <a:spcPts val="1820"/>
-              </a:lnSpc>
-              <a:spcBef>
-                <a:spcPts val="300"/>
-              </a:spcBef>
-              <a:spcAft>
-                <a:spcPts val="300"/>
-              </a:spcAft>
-              <a:buNone/>
-            </a:pPr>
-            <a:r>
-              <a:rPr lang="en-US" sz="1300" b="1" i="1" dirty="0">
-                <a:solidFill>
-                  <a:srgbClr val="1C2833"/>
-                </a:solidFill>
-                <a:latin typeface="Georgia" pitchFamily="34" charset="0"/>
-                <a:ea typeface="Georgia" pitchFamily="34" charset="-122"/>
-                <a:cs typeface="Georgia" pitchFamily="34" charset="-120"/>
-              </a:rPr>
-              <a:t>Today is showcase + quiz.</a:t>
-            </a:r>
-            <a:endParaRPr lang="en-US" sz="1300" dirty="0"/>
-          </a:p>
-        </p:txBody>
-      </p:sp>
-      <p:sp>
-        <p:nvSpPr>
-          <p:cNvPr id="7" name="Text 5"/>
-          <p:cNvSpPr/>
-          <p:nvPr/>
-        </p:nvSpPr>
-        <p:spPr>
-          <a:xfrm>
-            <a:off x="692051" y="1343174"/>
-            <a:ext cx="7973389" cy="692944"/>
-          </a:xfrm>
-          <a:prstGeom prst="rect">
-            <a:avLst/>
-          </a:prstGeom>
-          <a:noFill/>
-          <a:ln/>
-        </p:spPr>
-        <p:txBody>
-          <a:bodyPr wrap="square" lIns="0" tIns="0" rIns="0" bIns="0" rtlCol="0" anchor="t"/>
-          <a:lstStyle/>
-          <a:p>
+                <a:spcPts val="1620"/>
+              </a:lnSpc>
+              <a:spcAft>
+                <a:spcPts val="300"/>
+              </a:spcAft>
+              <a:buNone/>
+            </a:pPr>
+            <a:r>
+              <a:rPr lang="en-US" sz="1200" i="1" dirty="0">
+                <a:solidFill>
+                  <a:srgbClr val="1C2833"/>
+                </a:solidFill>
+                <a:latin typeface="Arial" pitchFamily="34" charset="0"/>
+                <a:ea typeface="Arial" pitchFamily="34" charset="-122"/>
+                <a:cs typeface="Arial" pitchFamily="34" charset="-120"/>
+              </a:rPr>
+              <a:t>"What stays with you?"</a:t>
+            </a:r>
+            <a:endParaRPr lang="en-US" sz="1200" dirty="0"/>
+          </a:p>
+          <a:p>
+            <a:pPr algn="l" marL="342900" indent="-342900">
+              <a:lnSpc>
+                <a:spcPts val="1620"/>
+              </a:lnSpc>
+              <a:spcAft>
+                <a:spcPts val="300"/>
+              </a:spcAft>
+              <a:buSzPct val="100000"/>
+              <a:buChar char="•"/>
+            </a:pPr>
+            <a:r>
+              <a:rPr lang="en-US" sz="1200" dirty="0">
+                <a:solidFill>
+                  <a:srgbClr val="1C2833"/>
+                </a:solidFill>
+                <a:latin typeface="Arial" pitchFamily="34" charset="0"/>
+                <a:ea typeface="Arial" pitchFamily="34" charset="-122"/>
+                <a:cs typeface="Arial" pitchFamily="34" charset="-120"/>
+              </a:rPr>
+              <a:t>Close: </a:t>
+            </a:r>
             <a:pPr algn="l" indent="0" marL="0">
               <a:lnSpc>
-                <a:spcPts val="1820"/>
-              </a:lnSpc>
-              <a:spcBef>
-                <a:spcPts val="300"/>
-              </a:spcBef>
-              <a:spcAft>
-                <a:spcPts val="300"/>
-              </a:spcAft>
-              <a:buNone/>
-            </a:pPr>
-            <a:r>
-              <a:rPr lang="en-US" sz="1300" i="1" dirty="0">
-                <a:solidFill>
-                  <a:srgbClr val="1C2833"/>
-                </a:solidFill>
-                <a:latin typeface="Georgia" pitchFamily="34" charset="0"/>
-                <a:ea typeface="Georgia" pitchFamily="34" charset="-122"/>
-                <a:cs typeface="Georgia" pitchFamily="34" charset="-120"/>
-              </a:rPr>
-              <a:t>1. Closed-book quiz, 20 min, 25 marks. 2. Present your favourite card from the deck for 2 minutes. Be ready for one quick question. 3. Leave with: the safety rule in your head, your deck in your hand, one fact you didn't know two weeks ago.</a:t>
-            </a:r>
-            <a:endParaRPr lang="en-US" sz="1300" dirty="0"/>
-          </a:p>
-        </p:txBody>
-      </p:sp>
-      <p:sp>
-        <p:nvSpPr>
-          <p:cNvPr id="8" name="Text 6"/>
+                <a:spcPts val="1620"/>
+              </a:lnSpc>
+              <a:spcAft>
+                <a:spcPts val="300"/>
+              </a:spcAft>
+              <a:buNone/>
+            </a:pPr>
+            <a:r>
+              <a:rPr lang="en-US" sz="1200" i="1" dirty="0">
+                <a:solidFill>
+                  <a:srgbClr val="1C2833"/>
+                </a:solidFill>
+                <a:latin typeface="Arial" pitchFamily="34" charset="0"/>
+                <a:ea typeface="Arial" pitchFamily="34" charset="-122"/>
+                <a:cs typeface="Arial" pitchFamily="34" charset="-120"/>
+              </a:rPr>
+              <a:t>"Three things to remember from this module: food amounts are safe; tradition and science can describe the same biological reality; ask 'how much' before you ask anything else about an herb."</a:t>
+            </a:r>
+            <a:endParaRPr lang="en-US" sz="1200" dirty="0"/>
+          </a:p>
+        </p:txBody>
+      </p:sp>
+      <p:sp>
+        <p:nvSpPr>
+          <p:cNvPr id="5" name="Text 3"/>
           <p:cNvSpPr/>
           <p:nvPr/>
         </p:nvSpPr>
@@ -4572,7 +5028,7 @@
                 <a:ea typeface="Georgia" pitchFamily="34" charset="-122"/>
                 <a:cs typeface="Georgia" pitchFamily="34" charset="-120"/>
               </a:rPr>
-              <a:t>Differentiation</a:t>
+              <a:t>Student-facing content</a:t>
             </a:r>
             <a:endParaRPr lang="en-US" sz="1800" dirty="0"/>
           </a:p>
@@ -4586,8 +5042,61 @@
         </p:nvSpPr>
         <p:spPr>
           <a:xfrm>
-            <a:off x="634901" y="883593"/>
-            <a:ext cx="8102798" cy="937022"/>
+            <a:off x="406301" y="883593"/>
+            <a:ext cx="8331398" cy="1650206"/>
+          </a:xfrm>
+          <a:prstGeom prst="rect">
+            <a:avLst/>
+          </a:prstGeom>
+          <a:solidFill>
+            <a:srgbClr val="F4F8F9"/>
+          </a:solidFill>
+          <a:ln/>
+        </p:spPr>
+        <p:txBody>
+          <a:bodyPr wrap="square" rtlCol="0" anchor="ctr"/>
+          <a:lstStyle/>
+          <a:p>
+            <a:pPr indent="0" marL="0">
+              <a:buNone/>
+            </a:pPr>
+            <a:endParaRPr lang="en-US" dirty="0"/>
+          </a:p>
+        </p:txBody>
+      </p:sp>
+      <p:sp>
+        <p:nvSpPr>
+          <p:cNvPr id="5" name="Shape 3"/>
+          <p:cNvSpPr/>
+          <p:nvPr/>
+        </p:nvSpPr>
+        <p:spPr>
+          <a:xfrm>
+            <a:off x="434876" y="883593"/>
+            <a:ext cx="0" cy="1650206"/>
+          </a:xfrm>
+          <a:prstGeom prst="line">
+            <a:avLst/>
+          </a:prstGeom>
+          <a:noFill/>
+          <a:ln w="57150">
+            <a:solidFill>
+              <a:srgbClr val="FE4447"/>
+            </a:solidFill>
+            <a:prstDash val="solid"/>
+          </a:ln>
+        </p:spPr>
+      </p:sp>
+      <p:sp>
+        <p:nvSpPr>
+          <p:cNvPr id="6" name="Text 4"/>
+          <p:cNvSpPr/>
+          <p:nvPr/>
+        </p:nvSpPr>
+        <p:spPr>
+          <a:xfrm>
+            <a:off x="692051" y="1074093"/>
+            <a:ext cx="7973389" cy="230981"/>
           </a:xfrm>
           <a:prstGeom prst="rect">
             <a:avLst/>
@@ -4599,138 +5108,180 @@
           <a:bodyPr wrap="square" lIns="0" tIns="0" rIns="0" bIns="0" rtlCol="0" anchor="t"/>
           <a:lstStyle/>
           <a:p>
-            <a:pPr algn="l" marL="342900" indent="-342900">
-              <a:lnSpc>
-                <a:spcPts val="1620"/>
-              </a:lnSpc>
-              <a:spcAft>
-                <a:spcPts val="300"/>
-              </a:spcAft>
-              <a:buSzPct val="100000"/>
-              <a:buChar char="•"/>
-            </a:pPr>
-            <a:r>
-              <a:rPr lang="en-US" sz="1200" b="1" dirty="0">
-                <a:solidFill>
-                  <a:srgbClr val="1C2833"/>
-                </a:solidFill>
-                <a:latin typeface="Arial" pitchFamily="34" charset="0"/>
-                <a:ea typeface="Arial" pitchFamily="34" charset="-122"/>
-                <a:cs typeface="Arial" pitchFamily="34" charset="-120"/>
-              </a:rPr>
-              <a:t>Tier up:</a:t>
-            </a:r>
             <a:pPr algn="l" indent="0" marL="0">
               <a:lnSpc>
-                <a:spcPts val="1620"/>
-              </a:lnSpc>
-              <a:spcAft>
-                <a:spcPts val="300"/>
-              </a:spcAft>
-              <a:buNone/>
-            </a:pPr>
-            <a:r>
-              <a:rPr lang="en-US" sz="1200" dirty="0">
-                <a:solidFill>
-                  <a:srgbClr val="1C2833"/>
-                </a:solidFill>
-                <a:latin typeface="Arial" pitchFamily="34" charset="0"/>
-                <a:ea typeface="Arial" pitchFamily="34" charset="-122"/>
-                <a:cs typeface="Arial" pitchFamily="34" charset="-120"/>
-              </a:rPr>
-              <a:t> Volunteers can present </a:t>
-            </a:r>
+                <a:spcPts val="1820"/>
+              </a:lnSpc>
+              <a:spcBef>
+                <a:spcPts val="300"/>
+              </a:spcBef>
+              <a:spcAft>
+                <a:spcPts val="300"/>
+              </a:spcAft>
+              <a:buNone/>
+            </a:pPr>
+            <a:r>
+              <a:rPr lang="en-US" sz="1300" b="1" i="1" dirty="0">
+                <a:solidFill>
+                  <a:srgbClr val="1C2833"/>
+                </a:solidFill>
+                <a:latin typeface="Georgia" pitchFamily="34" charset="0"/>
+                <a:ea typeface="Georgia" pitchFamily="34" charset="-122"/>
+                <a:cs typeface="Georgia" pitchFamily="34" charset="-120"/>
+              </a:rPr>
+              <a:t>Today is showcase + quiz.</a:t>
+            </a:r>
+            <a:endParaRPr lang="en-US" sz="1300" dirty="0"/>
+          </a:p>
+        </p:txBody>
+      </p:sp>
+      <p:sp>
+        <p:nvSpPr>
+          <p:cNvPr id="7" name="Text 5"/>
+          <p:cNvSpPr/>
+          <p:nvPr/>
+        </p:nvSpPr>
+        <p:spPr>
+          <a:xfrm>
+            <a:off x="692051" y="1343174"/>
+            <a:ext cx="7973389" cy="230981"/>
+          </a:xfrm>
+          <a:prstGeom prst="rect">
+            <a:avLst/>
+          </a:prstGeom>
+          <a:noFill/>
+          <a:ln/>
+        </p:spPr>
+        <p:txBody>
+          <a:bodyPr wrap="square" lIns="0" tIns="0" rIns="0" bIns="0" rtlCol="0" anchor="t"/>
+          <a:lstStyle/>
+          <a:p>
             <a:pPr algn="l" indent="0" marL="0">
               <a:lnSpc>
-                <a:spcPts val="1620"/>
-              </a:lnSpc>
-              <a:spcAft>
-                <a:spcPts val="300"/>
-              </a:spcAft>
-              <a:buNone/>
-            </a:pPr>
-            <a:r>
-              <a:rPr lang="en-US" sz="1200" b="1" dirty="0">
-                <a:solidFill>
-                  <a:srgbClr val="1C2833"/>
-                </a:solidFill>
-                <a:latin typeface="Arial" pitchFamily="34" charset="0"/>
-                <a:ea typeface="Arial" pitchFamily="34" charset="-122"/>
-                <a:cs typeface="Arial" pitchFamily="34" charset="-120"/>
-              </a:rPr>
-              <a:t>for</a:t>
-            </a:r>
+                <a:spcPts val="1820"/>
+              </a:lnSpc>
+              <a:spcBef>
+                <a:spcPts val="300"/>
+              </a:spcBef>
+              <a:spcAft>
+                <a:spcPts val="300"/>
+              </a:spcAft>
+              <a:buNone/>
+            </a:pPr>
+            <a:r>
+              <a:rPr lang="en-US" sz="1300" i="1" dirty="0">
+                <a:solidFill>
+                  <a:srgbClr val="1C2833"/>
+                </a:solidFill>
+                <a:latin typeface="Georgia" pitchFamily="34" charset="0"/>
+                <a:ea typeface="Georgia" pitchFamily="34" charset="-122"/>
+                <a:cs typeface="Georgia" pitchFamily="34" charset="-120"/>
+              </a:rPr>
+              <a:t>Closed-book quiz, 20 min, 25 marks.</a:t>
+            </a:r>
+            <a:endParaRPr lang="en-US" sz="1300" dirty="0"/>
+          </a:p>
+        </p:txBody>
+      </p:sp>
+      <p:sp>
+        <p:nvSpPr>
+          <p:cNvPr id="8" name="Text 6"/>
+          <p:cNvSpPr/>
+          <p:nvPr/>
+        </p:nvSpPr>
+        <p:spPr>
+          <a:xfrm>
+            <a:off x="692051" y="1612255"/>
+            <a:ext cx="7973389" cy="230981"/>
+          </a:xfrm>
+          <a:prstGeom prst="rect">
+            <a:avLst/>
+          </a:prstGeom>
+          <a:noFill/>
+          <a:ln/>
+        </p:spPr>
+        <p:txBody>
+          <a:bodyPr wrap="square" lIns="0" tIns="0" rIns="0" bIns="0" rtlCol="0" anchor="t"/>
+          <a:lstStyle/>
+          <a:p>
             <a:pPr algn="l" indent="0" marL="0">
               <a:lnSpc>
-                <a:spcPts val="1620"/>
-              </a:lnSpc>
-              <a:spcAft>
-                <a:spcPts val="300"/>
-              </a:spcAft>
-              <a:buNone/>
-            </a:pPr>
-            <a:r>
-              <a:rPr lang="en-US" sz="1200" dirty="0">
-                <a:solidFill>
-                  <a:srgbClr val="1C2833"/>
-                </a:solidFill>
-                <a:latin typeface="Arial" pitchFamily="34" charset="0"/>
-                <a:ea typeface="Arial" pitchFamily="34" charset="-122"/>
-                <a:cs typeface="Arial" pitchFamily="34" charset="-120"/>
-              </a:rPr>
-              <a:t> 3 minutes by request, presenting two cards — one of the six standard and one bonus card they made.</a:t>
-            </a:r>
-            <a:endParaRPr lang="en-US" sz="1200" dirty="0"/>
-          </a:p>
-          <a:p>
-            <a:pPr algn="l" marL="342900" indent="-342900">
-              <a:lnSpc>
-                <a:spcPts val="1620"/>
-              </a:lnSpc>
-              <a:spcAft>
-                <a:spcPts val="300"/>
-              </a:spcAft>
-              <a:buSzPct val="100000"/>
-              <a:buChar char="•"/>
-            </a:pPr>
-            <a:r>
-              <a:rPr lang="en-US" sz="1200" b="1" dirty="0">
-                <a:solidFill>
-                  <a:srgbClr val="1C2833"/>
-                </a:solidFill>
-                <a:latin typeface="Arial" pitchFamily="34" charset="0"/>
-                <a:ea typeface="Arial" pitchFamily="34" charset="-122"/>
-                <a:cs typeface="Arial" pitchFamily="34" charset="-120"/>
-              </a:rPr>
-              <a:t>Tier down:</a:t>
-            </a:r>
+                <a:spcPts val="1820"/>
+              </a:lnSpc>
+              <a:spcBef>
+                <a:spcPts val="300"/>
+              </a:spcBef>
+              <a:spcAft>
+                <a:spcPts val="300"/>
+              </a:spcAft>
+              <a:buNone/>
+            </a:pPr>
+            <a:r>
+              <a:rPr lang="en-US" sz="1300" i="1" dirty="0">
+                <a:solidFill>
+                  <a:srgbClr val="1C2833"/>
+                </a:solidFill>
+                <a:latin typeface="Georgia" pitchFamily="34" charset="0"/>
+                <a:ea typeface="Georgia" pitchFamily="34" charset="-122"/>
+                <a:cs typeface="Georgia" pitchFamily="34" charset="-120"/>
+              </a:rPr>
+              <a:t>Present your favourite card from the deck for 2 minutes. Be ready for one quick question.</a:t>
+            </a:r>
+            <a:endParaRPr lang="en-US" sz="1300" dirty="0"/>
+          </a:p>
+        </p:txBody>
+      </p:sp>
+      <p:sp>
+        <p:nvSpPr>
+          <p:cNvPr id="9" name="Text 7"/>
+          <p:cNvSpPr/>
+          <p:nvPr/>
+        </p:nvSpPr>
+        <p:spPr>
+          <a:xfrm>
+            <a:off x="692051" y="1881336"/>
+            <a:ext cx="7973389" cy="461963"/>
+          </a:xfrm>
+          <a:prstGeom prst="rect">
+            <a:avLst/>
+          </a:prstGeom>
+          <a:noFill/>
+          <a:ln/>
+        </p:spPr>
+        <p:txBody>
+          <a:bodyPr wrap="square" lIns="0" tIns="0" rIns="0" bIns="0" rtlCol="0" anchor="t"/>
+          <a:lstStyle/>
+          <a:p>
             <a:pPr algn="l" indent="0" marL="0">
               <a:lnSpc>
-                <a:spcPts val="1620"/>
-              </a:lnSpc>
-              <a:spcAft>
-                <a:spcPts val="300"/>
-              </a:spcAft>
-              <a:buNone/>
-            </a:pPr>
-            <a:r>
-              <a:rPr lang="en-US" sz="1200" dirty="0">
-                <a:solidFill>
-                  <a:srgbClr val="1C2833"/>
-                </a:solidFill>
-                <a:latin typeface="Arial" pitchFamily="34" charset="0"/>
-                <a:ea typeface="Arial" pitchFamily="34" charset="-122"/>
-                <a:cs typeface="Arial" pitchFamily="34" charset="-120"/>
-              </a:rPr>
-              <a:t> A student who freezes can have their pair-partner present while they hold up the card. Don't make this a failure mode.</a:t>
-            </a:r>
-            <a:endParaRPr lang="en-US" sz="1200" dirty="0"/>
-          </a:p>
-        </p:txBody>
-      </p:sp>
-      <p:sp>
-        <p:nvSpPr>
-          <p:cNvPr id="5" name="Text 3"/>
+                <a:spcPts val="1820"/>
+              </a:lnSpc>
+              <a:spcBef>
+                <a:spcPts val="300"/>
+              </a:spcBef>
+              <a:spcAft>
+                <a:spcPts val="300"/>
+              </a:spcAft>
+              <a:buNone/>
+            </a:pPr>
+            <a:r>
+              <a:rPr lang="en-US" sz="1300" i="1" dirty="0">
+                <a:solidFill>
+                  <a:srgbClr val="1C2833"/>
+                </a:solidFill>
+                <a:latin typeface="Georgia" pitchFamily="34" charset="0"/>
+                <a:ea typeface="Georgia" pitchFamily="34" charset="-122"/>
+                <a:cs typeface="Georgia" pitchFamily="34" charset="-120"/>
+              </a:rPr>
+              <a:t>Leave with: the safety rule in your head, your deck in your hand, one fact you didn't know two weeks ago.</a:t>
+            </a:r>
+            <a:endParaRPr lang="en-US" sz="1300" dirty="0"/>
+          </a:p>
+        </p:txBody>
+      </p:sp>
+      <p:sp>
+        <p:nvSpPr>
+          <p:cNvPr id="10" name="Text 8"/>
           <p:cNvSpPr/>
           <p:nvPr/>
         </p:nvSpPr>
